--- a/docs/presentations/leadprocure-az/v3/output/Leadprocure_Korporativ_Teqdimat_AZ_v3.pptx
+++ b/docs/presentations/leadprocure-az/v3/output/Leadprocure_Korporativ_Teqdimat_AZ_v3.pptx
@@ -686,7 +686,7 @@
           <a:lstStyle/>
           <a:p>
             <a:r>
-              <a:t>Büdcə istifadəsi kateqoriya, il və valyuta üzrə uyğun təsdiqlənmiş tələblərdən hesablanır. Bu göstərici bank hesabındakı qalıq və ya ödənilmiş məbləğ deyil. Xərc analitikası isə qəbul edilmiş PO-lara əsaslanır; aylar, kateqoriyalar, əsas təchizatçılar və qaimə statusları üzrə baxış verir. Büdcə aşımı xəbərdarlıq yaradır, təsdiqi avtomatik bloklamır. Müştəriyə bu fərqi açıq izah edin: platforma qərar üçün görünürlük verir və mövcud qaydaları tətbiq edir; maliyyə siyasətinin bütün sərt bloklama tələblərinin artıq hazır olduğunu vəd etmir. Xərclər valyutalar üzrə ayrılır; aylıq qrafik sifarişin yaradılma tarixinə görə qurulur. Analitika ləğv olunmuş nəticələri daxil etmir.</a:t>
+              <a:t>Büdcələr AZN ilə şöbə, kateqoriya və dövr üzrə planlaşdırılır; planın təsdiqi, reviziyası və dövrün bağlanması dəstəklənir. Tələblər, sifarişlər və qaimələr plan və faktiki göstəricilərlə əlaqələndirilir. Bu göstəricilər bank hesabındakı qalıq deyil. Standart qaydada büdcə aşımı xəbərdarlıq yaradır; təşkilat bloklama həddi sazlayıbsa, uyğun aşım təsdiqi dayandırır. Administratorun istisnası səbəblə əsaslandırılır. Maliyyə əməkdaşı yalnız ona təyin edilmiş maliyyə təsdiq addımını yerinə yetirir. Xərc analitikası qəbul edilmiş PO-lara əsaslanır; xərclər valyutalar üzrə ayrılır, aylıq qrafik sifarişin yaradılma tarixinə görə qurulur. Ləğv edilmiş nəticələr qənaət hesablamasına daxil edilmir. Bunları bank ödənişi və ya avtomatik valyuta konvertasiyası kimi təqdim etməyin.</a:t>
             </a:r>
           </a:p>
           <a:p/>
@@ -697,12 +697,22 @@
           </a:p>
           <a:p>
             <a:r>
-              <a:t>apps/api/src/modules/budgets/budgets.module.ts:30–63,114–137</a:t>
-            </a:r>
-          </a:p>
-          <a:p>
-            <a:r>
-              <a:t>apps/api/src/modules/dashboard/dashboard.module.ts:86–147</a:t>
+              <a:t>apps/api/src/modules/budgets/budgets.module.ts</a:t>
+            </a:r>
+          </a:p>
+          <a:p>
+            <a:r>
+              <a:t>apps/api/src/modules/requests/requests.module.ts</a:t>
+            </a:r>
+          </a:p>
+          <a:p>
+            <a:r>
+              <a:t>apps/api/src/modules/dashboard/dashboard.module.ts</a:t>
+            </a:r>
+          </a:p>
+          <a:p>
+            <a:r>
+              <a:t>apps/api/test/budget-integration.e2e-spec.ts</a:t>
             </a:r>
           </a:p>
         </p:txBody>
@@ -6719,7 +6729,7 @@
               </a:defRPr>
             </a:pPr>
             <a:r>
-              <a:t>Limit aşımı xəbərdarlıq yaradır; təsdiqi bloklamır.</a:t>
+              <a:t>Aşım xəbərdarlığı; sazlanmış hədd üzrə bloklama.</a:t>
             </a:r>
           </a:p>
         </p:txBody>
